--- a/assets/powerpoints/module-n1-classe/A2-deux-ou-douze.pptx
+++ b/assets/powerpoints/module-n1-classe/A2-deux-ou-douze.pptx
@@ -5148,7 +5148,25 @@
                 </a:solidFill>
                 <a:latin typeface="Verdana"/>
               </a:rPr>
-              <a:t>Le début de « deux » et de « douze » se ressemble beaucoup. Une seconde d'attente suffit : c'est la &lt;b&gt;fin&lt;/b&gt; qui porte la différence.</a:t>
+              <a:t>Le début de « deux » et de « douze » se ressemble beaucoup. Une seconde d'attente suffit : c'est la </a:t>
+            </a:r>
+            <a:r>
+              <a:rPr sz="2000" b="1" i="0">
+                <a:solidFill>
+                  <a:srgbClr val="4B4F52"/>
+                </a:solidFill>
+                <a:latin typeface="Verdana"/>
+              </a:rPr>
+              <a:t>fin</a:t>
+            </a:r>
+            <a:r>
+              <a:rPr sz="2000" b="0" i="0">
+                <a:solidFill>
+                  <a:srgbClr val="4B4F52"/>
+                </a:solidFill>
+                <a:latin typeface="Verdana"/>
+              </a:rPr>
+              <a:t> qui porte la différence.</a:t>
             </a:r>
           </a:p>
         </p:txBody>
@@ -5495,7 +5513,25 @@
                 </a:solidFill>
                 <a:latin typeface="Verdana"/>
               </a:rPr>
-              <a:t>Quand vous n'êtes pas sûr du nombre, dites « &lt;b&gt;Pardon ?&lt;/b&gt; » L'enseignante répétera plus lentement. Ce n'est pas une faute : c'est une phrase de la langue.</a:t>
+              <a:t>Quand vous n'êtes pas sûr du nombre, dites « </a:t>
+            </a:r>
+            <a:r>
+              <a:rPr sz="2000" b="1" i="0">
+                <a:solidFill>
+                  <a:srgbClr val="4B4F52"/>
+                </a:solidFill>
+                <a:latin typeface="Verdana"/>
+              </a:rPr>
+              <a:t>Pardon ?</a:t>
+            </a:r>
+            <a:r>
+              <a:rPr sz="2000" b="0" i="0">
+                <a:solidFill>
+                  <a:srgbClr val="4B4F52"/>
+                </a:solidFill>
+                <a:latin typeface="Verdana"/>
+              </a:rPr>
+              <a:t> » L'enseignante répétera plus lentement. Ce n'est pas une faute : c'est une phrase de la langue.</a:t>
             </a:r>
           </a:p>
         </p:txBody>
@@ -8114,13 +8150,112 @@
               </a:lnSpc>
             </a:pPr>
             <a:r>
+              <a:rPr sz="2000" b="1" i="0">
+                <a:solidFill>
+                  <a:srgbClr val="4B4F52"/>
+                </a:solidFill>
+                <a:latin typeface="Verdana"/>
+              </a:rPr>
+              <a:t>deux</a:t>
+            </a:r>
+            <a:r>
               <a:rPr sz="2000" b="0" i="0">
                 <a:solidFill>
                   <a:srgbClr val="4B4F52"/>
                 </a:solidFill>
                 <a:latin typeface="Verdana"/>
               </a:rPr>
-              <a:t>&lt;b&gt;deux&lt;/b&gt; et &lt;b&gt;douze&lt;/b&gt;, &lt;b&gt;trois&lt;/b&gt; et &lt;b&gt;treize&lt;/b&gt;, &lt;b&gt;six&lt;/b&gt; et &lt;b&gt;seize&lt;/b&gt; : le grand nombre finit par le son « ze ». Le petit s'arrête avant.</a:t>
+              <a:t> et </a:t>
+            </a:r>
+            <a:r>
+              <a:rPr sz="2000" b="1" i="0">
+                <a:solidFill>
+                  <a:srgbClr val="4B4F52"/>
+                </a:solidFill>
+                <a:latin typeface="Verdana"/>
+              </a:rPr>
+              <a:t>douze</a:t>
+            </a:r>
+            <a:r>
+              <a:rPr sz="2000" b="0" i="0">
+                <a:solidFill>
+                  <a:srgbClr val="4B4F52"/>
+                </a:solidFill>
+                <a:latin typeface="Verdana"/>
+              </a:rPr>
+              <a:t>, </a:t>
+            </a:r>
+            <a:r>
+              <a:rPr sz="2000" b="1" i="0">
+                <a:solidFill>
+                  <a:srgbClr val="4B4F52"/>
+                </a:solidFill>
+                <a:latin typeface="Verdana"/>
+              </a:rPr>
+              <a:t>trois</a:t>
+            </a:r>
+            <a:r>
+              <a:rPr sz="2000" b="0" i="0">
+                <a:solidFill>
+                  <a:srgbClr val="4B4F52"/>
+                </a:solidFill>
+                <a:latin typeface="Verdana"/>
+              </a:rPr>
+              <a:t> et </a:t>
+            </a:r>
+            <a:r>
+              <a:rPr sz="2000" b="1" i="0">
+                <a:solidFill>
+                  <a:srgbClr val="4B4F52"/>
+                </a:solidFill>
+                <a:latin typeface="Verdana"/>
+              </a:rPr>
+              <a:t>treize</a:t>
+            </a:r>
+            <a:r>
+              <a:rPr sz="2000" b="0" i="0">
+                <a:solidFill>
+                  <a:srgbClr val="4B4F52"/>
+                </a:solidFill>
+                <a:latin typeface="Verdana"/>
+              </a:rPr>
+              <a:t>, </a:t>
+            </a:r>
+            <a:r>
+              <a:rPr sz="2000" b="1" i="0">
+                <a:solidFill>
+                  <a:srgbClr val="4B4F52"/>
+                </a:solidFill>
+                <a:latin typeface="Verdana"/>
+              </a:rPr>
+              <a:t>six</a:t>
+            </a:r>
+            <a:r>
+              <a:rPr sz="2000" b="0" i="0">
+                <a:solidFill>
+                  <a:srgbClr val="4B4F52"/>
+                </a:solidFill>
+                <a:latin typeface="Verdana"/>
+              </a:rPr>
+              <a:t> et </a:t>
+            </a:r>
+            <a:r>
+              <a:rPr sz="2000" b="1" i="0">
+                <a:solidFill>
+                  <a:srgbClr val="4B4F52"/>
+                </a:solidFill>
+                <a:latin typeface="Verdana"/>
+              </a:rPr>
+              <a:t>seize</a:t>
+            </a:r>
+            <a:r>
+              <a:rPr sz="2000" b="0" i="0">
+                <a:solidFill>
+                  <a:srgbClr val="4B4F52"/>
+                </a:solidFill>
+                <a:latin typeface="Verdana"/>
+              </a:rPr>
+              <a:t> : le grand nombre finit par le son « ze ». Le petit s'arrête avant.</a:t>
             </a:r>
           </a:p>
         </p:txBody>
